--- a/docs/교육자료/사내LLM연결_LangChain입문.pptx
+++ b/docs/교육자료/사내LLM연결_LangChain입문.pptx
@@ -1878,6 +1878,10 @@
             <a:prstDash val="solid"/>
           </a:ln>
         </p:spPr>
+        <p:txBody>
+          <a:bodyPr/>
+          <a:p/>
+        </p:txBody>
       </p:sp>
       <p:sp>
         <p:nvSpPr>
@@ -1903,6 +1907,10 @@
             <a:prstDash val="solid"/>
           </a:ln>
         </p:spPr>
+        <p:txBody>
+          <a:bodyPr/>
+          <a:p/>
+        </p:txBody>
       </p:sp>
       <p:sp>
         <p:nvSpPr>
@@ -1937,7 +1945,7 @@
                 <a:ea typeface="Calibri" pitchFamily="34" charset="-122"/>
                 <a:cs typeface="Calibri" pitchFamily="34" charset="-120"/>
               </a:rPr>
-              <a:t>교육자료 · 초안</a:t>
+              <a:t>교육자료 · 1편</a:t>
             </a:r>
             <a:endParaRPr lang="en-US" sz="1400" dirty="0"/>
           </a:p>
@@ -2093,6 +2101,10 @@
             <a:prstDash val="solid"/>
           </a:ln>
         </p:spPr>
+        <p:txBody>
+          <a:bodyPr/>
+          <a:p/>
+        </p:txBody>
       </p:sp>
       <p:sp>
         <p:nvSpPr>
@@ -2156,6 +2168,10 @@
             <a:tailEnd type="triangle"/>
           </a:ln>
         </p:spPr>
+        <p:txBody>
+          <a:bodyPr/>
+          <a:p/>
+        </p:txBody>
       </p:sp>
       <p:sp>
         <p:nvSpPr>
@@ -2183,6 +2199,10 @@
             <a:prstDash val="solid"/>
           </a:ln>
         </p:spPr>
+        <p:txBody>
+          <a:bodyPr/>
+          <a:p/>
+        </p:txBody>
       </p:sp>
       <p:sp>
         <p:nvSpPr>
@@ -2246,6 +2266,10 @@
             <a:tailEnd type="triangle"/>
           </a:ln>
         </p:spPr>
+        <p:txBody>
+          <a:bodyPr/>
+          <a:p/>
+        </p:txBody>
       </p:sp>
       <p:sp>
         <p:nvSpPr>
@@ -2273,6 +2297,10 @@
             <a:prstDash val="solid"/>
           </a:ln>
         </p:spPr>
+        <p:txBody>
+          <a:bodyPr/>
+          <a:p/>
+        </p:txBody>
       </p:sp>
       <p:sp>
         <p:nvSpPr>
@@ -4384,6 +4412,10 @@
             <a:prstDash val="solid"/>
           </a:ln>
         </p:spPr>
+        <p:txBody>
+          <a:bodyPr/>
+          <a:p/>
+        </p:txBody>
       </p:sp>
       <p:sp>
         <p:nvSpPr>
@@ -4487,6 +4519,10 @@
             <a:prstDash val="solid"/>
           </a:ln>
         </p:spPr>
+        <p:txBody>
+          <a:bodyPr/>
+          <a:p/>
+        </p:txBody>
       </p:sp>
       <p:sp>
         <p:nvSpPr>
@@ -4593,6 +4629,10 @@
             <a:prstDash val="solid"/>
           </a:ln>
         </p:spPr>
+        <p:txBody>
+          <a:bodyPr/>
+          <a:p/>
+        </p:txBody>
       </p:sp>
       <p:sp>
         <p:nvSpPr>
@@ -4699,6 +4739,10 @@
             <a:prstDash val="solid"/>
           </a:ln>
         </p:spPr>
+        <p:txBody>
+          <a:bodyPr/>
+          <a:p/>
+        </p:txBody>
       </p:sp>
       <p:sp>
         <p:nvSpPr>
@@ -4805,6 +4849,10 @@
             <a:prstDash val="solid"/>
           </a:ln>
         </p:spPr>
+        <p:txBody>
+          <a:bodyPr/>
+          <a:p/>
+        </p:txBody>
       </p:sp>
       <p:sp>
         <p:nvSpPr>
@@ -4913,6 +4961,10 @@
             <a:prstDash val="solid"/>
           </a:ln>
         </p:spPr>
+        <p:txBody>
+          <a:bodyPr/>
+          <a:p/>
+        </p:txBody>
       </p:sp>
       <p:sp>
         <p:nvSpPr>
@@ -4947,7 +4999,7 @@
                 <a:ea typeface="Calibri" pitchFamily="34" charset="-122"/>
                 <a:cs typeface="Calibri" pitchFamily="34" charset="-120"/>
               </a:rPr>
-              <a:t>다음 단계  →  </a:t>
+              <a:t>다음 단계 → </a:t>
             </a:r>
             <a:pPr indent="0" marL="0">
               <a:buNone/>
@@ -4961,7 +5013,7 @@
                 <a:ea typeface="Calibri" pitchFamily="34" charset="-122"/>
                 <a:cs typeface="Calibri" pitchFamily="34" charset="-120"/>
               </a:rPr>
-              <a:t>주제 2: 디버그 로깅 — LLM이 실제로 무엇을 주고받는지 파일로 남겨 눈으로 확인하기</a:t>
+              <a:t>주제 2: 프롬프트 입력 &amp; LangChain vs LangGraph</a:t>
             </a:r>
             <a:endParaRPr lang="en-US" sz="1500" dirty="0"/>
           </a:p>
